--- a/문제해결프로그래밍_숙제/숙제4. 정렬 알고리즘.pptx
+++ b/문제해결프로그래밍_숙제/숙제4. 정렬 알고리즘.pptx
@@ -276,7 +276,7 @@
               <a:pPr>
                 <a:defRPr/>
               </a:pPr>
-              <a:t>2026-03-01</a:t>
+              <a:t>2026-04-18</a:t>
             </a:fld>
             <a:endParaRPr lang="ko-KR" altLang="en-US"/>
           </a:p>
@@ -8295,6 +8295,14 @@
               <a:t>(</a:t>
             </a:r>
             <a:r>
+              <a:rPr lang="en-US" altLang="ko-KR" sz="3200" dirty="0" err="1"/>
+              <a:t>TUKorea</a:t>
+            </a:r>
+            <a:r>
+              <a:rPr lang="en-US" altLang="ko-KR" sz="3200" dirty="0"/>
+              <a:t>, </a:t>
+            </a:r>
+            <a:r>
               <a:rPr lang="ko-KR" altLang="en-US" sz="3200" dirty="0"/>
               <a:t>백준</a:t>
             </a:r>
@@ -8311,10 +8319,17 @@
               <a:t>) </a:t>
             </a:r>
             <a:br>
-              <a:rPr lang="en-US" altLang="ko-KR" sz="3200" dirty="0"/>
+              <a:rPr lang="en-US" altLang="ko-KR" sz="2800" dirty="0"/>
             </a:br>
             <a:r>
-              <a:rPr lang="en-US" altLang="ko-KR" sz="3200" dirty="0"/>
+              <a:rPr lang="en-US" altLang="ko-KR" sz="1800" dirty="0"/>
+              <a:t>http://210.93.60.51/problem/0203</a:t>
+            </a:r>
+            <a:br>
+              <a:rPr lang="en-US" altLang="ko-KR" sz="1800" dirty="0"/>
+            </a:br>
+            <a:r>
+              <a:rPr lang="en-US" altLang="ko-KR" sz="1800" dirty="0"/>
               <a:t>https://www.acmicpc.net/problem/13416</a:t>
             </a:r>
             <a:endParaRPr lang="ko-KR" altLang="en-US" sz="3200" dirty="0"/>
@@ -8712,7 +8727,12 @@
             <p:ph type="title"/>
           </p:nvPr>
         </p:nvSpPr>
-        <p:spPr/>
+        <p:spPr>
+          <a:xfrm>
+            <a:off x="323528" y="274638"/>
+            <a:ext cx="8363272" cy="868346"/>
+          </a:xfrm>
+        </p:spPr>
         <p:txBody>
           <a:bodyPr/>
           <a:lstStyle/>
@@ -8723,11 +8743,19 @@
             </a:r>
             <a:r>
               <a:rPr lang="ko-KR" altLang="en-US" sz="3200" dirty="0"/>
-              <a:t>회의실 배정</a:t>
+              <a:t>회의실 배정 </a:t>
             </a:r>
             <a:r>
               <a:rPr lang="en-US" altLang="ko-KR" sz="3200" dirty="0"/>
               <a:t>(</a:t>
+            </a:r>
+            <a:r>
+              <a:rPr lang="en-US" altLang="ko-KR" sz="3200" dirty="0" err="1"/>
+              <a:t>TUKorea</a:t>
+            </a:r>
+            <a:r>
+              <a:rPr lang="en-US" altLang="ko-KR" sz="3200" dirty="0"/>
+              <a:t>, </a:t>
             </a:r>
             <a:r>
               <a:rPr lang="ko-KR" altLang="en-US" sz="3200" dirty="0"/>
@@ -8761,7 +8789,14 @@
               <a:rPr lang="en-US" altLang="ko-KR" sz="3200" dirty="0"/>
             </a:br>
             <a:r>
-              <a:rPr lang="en-US" altLang="ko-KR" sz="3200" dirty="0"/>
+              <a:rPr lang="en-US" altLang="ko-KR" sz="1800" dirty="0"/>
+              <a:t>http://210.93.60.51/problem/0204</a:t>
+            </a:r>
+            <a:br>
+              <a:rPr lang="en-US" altLang="ko-KR" sz="1800" dirty="0"/>
+            </a:br>
+            <a:r>
+              <a:rPr lang="en-US" altLang="ko-KR" sz="1800" dirty="0"/>
               <a:t>https://www.acmicpc.net/problem/1931</a:t>
             </a:r>
             <a:endParaRPr lang="ko-KR" altLang="en-US" sz="3200" dirty="0"/>
@@ -9217,38 +9252,38 @@
           <a:lstStyle/>
           <a:p>
             <a:r>
-              <a:rPr lang="en-US" altLang="ko-KR" sz="2800" dirty="0"/>
+              <a:rPr lang="en-US" altLang="ko-KR" sz="3200" dirty="0"/>
               <a:t>3. </a:t>
             </a:r>
             <a:r>
-              <a:rPr lang="ko-KR" altLang="en-US" sz="2800" dirty="0"/>
+              <a:rPr lang="ko-KR" altLang="en-US" sz="3200" dirty="0"/>
               <a:t>행렬 게임</a:t>
             </a:r>
             <a:r>
-              <a:rPr lang="en-US" altLang="ko-KR" sz="2800" dirty="0"/>
+              <a:rPr lang="en-US" altLang="ko-KR" sz="3200" dirty="0"/>
               <a:t>(</a:t>
             </a:r>
             <a:r>
-              <a:rPr lang="en-US" altLang="ko-KR" sz="2800" dirty="0" err="1"/>
+              <a:rPr lang="en-US" altLang="ko-KR" sz="3200" dirty="0" err="1"/>
               <a:t>TUKorea</a:t>
             </a:r>
             <a:r>
-              <a:rPr lang="en-US" altLang="ko-KR" sz="2800" dirty="0"/>
+              <a:rPr lang="en-US" altLang="ko-KR" sz="3200" dirty="0"/>
               <a:t>, </a:t>
             </a:r>
             <a:r>
-              <a:rPr lang="ko-KR" altLang="en-US" sz="2800" dirty="0"/>
+              <a:rPr lang="ko-KR" altLang="en-US" sz="3200" dirty="0"/>
               <a:t>구현</a:t>
             </a:r>
             <a:r>
-              <a:rPr lang="en-US" altLang="ko-KR" sz="2800" dirty="0"/>
+              <a:rPr lang="en-US" altLang="ko-KR" sz="3200" dirty="0"/>
               <a:t>) </a:t>
             </a:r>
             <a:br>
-              <a:rPr lang="en-US" altLang="ko-KR" sz="2800" dirty="0"/>
+              <a:rPr lang="en-US" altLang="ko-KR" sz="3200" dirty="0"/>
             </a:br>
             <a:r>
-              <a:rPr lang="en-US" altLang="ko-KR" sz="2800" dirty="0"/>
+              <a:rPr lang="en-US" altLang="ko-KR" sz="2000" dirty="0"/>
               <a:t>http://210.93.60.51/problem/0063</a:t>
             </a:r>
             <a:endParaRPr lang="ko-KR" altLang="en-US" sz="2800" dirty="0"/>
@@ -9903,7 +9938,7 @@
         <p:spPr>
           <a:xfrm>
             <a:off x="107504" y="274638"/>
-            <a:ext cx="8856984" cy="868346"/>
+            <a:ext cx="9036496" cy="868346"/>
           </a:xfrm>
         </p:spPr>
         <p:txBody>
@@ -9911,53 +9946,64 @@
           <a:lstStyle/>
           <a:p>
             <a:r>
-              <a:rPr lang="en-US" altLang="ko-KR" sz="3200" dirty="0"/>
+              <a:rPr lang="en-US" altLang="ko-KR" sz="2800" dirty="0"/>
               <a:t>5. </a:t>
             </a:r>
             <a:r>
-              <a:rPr lang="ko-KR" altLang="en-US" sz="3200" dirty="0"/>
+              <a:rPr lang="ko-KR" altLang="en-US" sz="2800" dirty="0"/>
               <a:t>소가 길을 건너간 이유 </a:t>
             </a:r>
             <a:r>
-              <a:rPr lang="en-US" altLang="ko-KR" sz="3200" dirty="0"/>
+              <a:rPr lang="en-US" altLang="ko-KR" sz="2800" dirty="0"/>
               <a:t>3(</a:t>
             </a:r>
             <a:r>
-              <a:rPr lang="ko-KR" altLang="en-US" sz="3200" dirty="0"/>
+              <a:rPr lang="en-US" altLang="ko-KR" sz="2800" dirty="0" err="1"/>
+              <a:t>TUKorea</a:t>
+            </a:r>
+            <a:r>
+              <a:rPr lang="en-US" altLang="ko-KR" sz="2800" dirty="0"/>
+              <a:t>,</a:t>
+            </a:r>
+            <a:r>
+              <a:rPr lang="ko-KR" altLang="en-US" sz="2800" dirty="0"/>
               <a:t>백준</a:t>
             </a:r>
             <a:r>
-              <a:rPr lang="en-US" altLang="ko-KR" sz="3200" dirty="0"/>
-              <a:t>, </a:t>
-            </a:r>
-            <a:r>
-              <a:rPr lang="ko-KR" altLang="en-US" sz="3200" dirty="0"/>
+              <a:rPr lang="en-US" altLang="ko-KR" sz="2800" dirty="0"/>
+              <a:t>,</a:t>
+            </a:r>
+            <a:r>
+              <a:rPr lang="ko-KR" altLang="en-US" sz="2800" dirty="0"/>
               <a:t>정렬</a:t>
             </a:r>
             <a:r>
-              <a:rPr lang="en-US" altLang="ko-KR" sz="3200" dirty="0"/>
+              <a:rPr lang="en-US" altLang="ko-KR" sz="2800" dirty="0"/>
               <a:t>,</a:t>
             </a:r>
             <a:r>
-              <a:rPr lang="ko-KR" altLang="en-US" sz="3200" dirty="0"/>
-              <a:t> </a:t>
-            </a:r>
-            <a:r>
-              <a:rPr lang="ko-KR" altLang="en-US" sz="3200" dirty="0" err="1"/>
+              <a:rPr lang="ko-KR" altLang="en-US" sz="2800" dirty="0" err="1"/>
               <a:t>그리디</a:t>
             </a:r>
             <a:r>
-              <a:rPr lang="en-US" altLang="ko-KR" sz="3200" dirty="0"/>
+              <a:rPr lang="en-US" altLang="ko-KR" sz="2800" dirty="0"/>
               <a:t>)</a:t>
             </a:r>
             <a:br>
-              <a:rPr lang="en-US" altLang="ko-KR" sz="3200" dirty="0"/>
+              <a:rPr lang="en-US" altLang="ko-KR" sz="2800" dirty="0"/>
             </a:br>
             <a:r>
-              <a:rPr lang="en-US" altLang="ko-KR" sz="3200" dirty="0"/>
+              <a:rPr lang="en-US" altLang="ko-KR" sz="1800" dirty="0"/>
+              <a:t>http://210.93.60.51/problem/0205</a:t>
+            </a:r>
+            <a:br>
+              <a:rPr lang="en-US" altLang="ko-KR" sz="1800" dirty="0"/>
+            </a:br>
+            <a:r>
+              <a:rPr lang="en-US" altLang="ko-KR" sz="1800" dirty="0"/>
               <a:t>https://www.acmicpc.net/problem/14469</a:t>
             </a:r>
-            <a:endParaRPr lang="ko-KR" altLang="en-US" sz="3200" dirty="0"/>
+            <a:endParaRPr lang="ko-KR" altLang="en-US" sz="2800" dirty="0"/>
           </a:p>
         </p:txBody>
       </p:sp>
